--- a/Poster Graphics v3/pptx poster/08_model_card_table.pptx
+++ b/Poster Graphics v3/pptx poster/08_model_card_table.pptx
@@ -3118,7 +3118,7 @@
               </a:defRPr>
             </a:pPr>
             <a:r>
-              <a:t>Physics-Guided Head Adds &lt;0.25% Parameters Across All Architectures</a:t>
+              <a:t>Model Parameter Comparison</a:t>
             </a:r>
           </a:p>
         </p:txBody>
